--- a/AIML 1.pptx
+++ b/AIML 1.pptx
@@ -23,11 +23,11 @@
   <p:notesSz cx="5143500" cy="9144000"/>
   <p:embeddedFontLst>
     <p:embeddedFont>
-      <p:font typeface="Inter" panose="02000503000000020004" pitchFamily="2" charset="0"/>
+      <p:font typeface="Inter" panose="02000503000000020004"/>
       <p:regular r:id="rId13"/>
     </p:embeddedFont>
     <p:embeddedFont>
-      <p:font typeface="Petrona Bold" pitchFamily="2" charset="77"/>
+      <p:font typeface="Petrona Bold"/>
       <p:regular r:id="rId14"/>
       <p:bold r:id="rId15"/>
     </p:embeddedFont>
@@ -1891,9 +1891,10 @@
           </a:p>
           <a:p>
             <a:r>
-              <a:rPr lang="en-US" sz="1200" dirty="0"/>
-              <a:t>32312951003</a:t>
-            </a:r>
+              <a:rPr lang="en-US" sz="1200"/>
+              <a:t>323129510003</a:t>
+            </a:r>
+            <a:endParaRPr lang="en-US" sz="1200" dirty="0"/>
           </a:p>
         </p:txBody>
       </p:sp>
